--- a/reports/BRANCH_KUPANG_PERFORMANCE_SUMMARY_20260902_INARA.pptx
+++ b/reports/BRANCH_KUPANG_PERFORMANCE_SUMMARY_20260902_INARA.pptx
@@ -12495,7 +12495,7 @@
                 </a:solidFill>
                 <a:latin typeface="Arial"/>
               </a:rPr>
-              <a:t>17</a:t>
+              <a:t>23</a:t>
             </a:r>
           </a:p>
         </p:txBody>
@@ -12526,11 +12526,11 @@
             <a:r>
               <a:rPr sz="1200" b="1" i="0">
                 <a:solidFill>
-                  <a:srgbClr val="D73527"/>
+                  <a:srgbClr val="687386"/>
                 </a:solidFill>
                 <a:latin typeface="Arial"/>
               </a:rPr>
-              <a:t>-80,9%</a:t>
+              <a:t>N/A</a:t>
             </a:r>
           </a:p>
         </p:txBody>
@@ -12565,7 +12565,7 @@
                 </a:solidFill>
                 <a:latin typeface="Arial"/>
               </a:rPr>
-              <a:t>MTD-1: 89   Δ -72</a:t>
+              <a:t>MTD-1: 0   Δ 23</a:t>
             </a:r>
           </a:p>
         </p:txBody>
@@ -12682,7 +12682,7 @@
                 </a:solidFill>
                 <a:latin typeface="Arial"/>
               </a:rPr>
-              <a:t>170</a:t>
+              <a:t>264</a:t>
             </a:r>
           </a:p>
         </p:txBody>
@@ -12713,11 +12713,11 @@
             <a:r>
               <a:rPr sz="1200" b="1" i="0">
                 <a:solidFill>
-                  <a:srgbClr val="D73527"/>
+                  <a:srgbClr val="687386"/>
                 </a:solidFill>
                 <a:latin typeface="Arial"/>
               </a:rPr>
-              <a:t>-95,6%</a:t>
+              <a:t>N/A</a:t>
             </a:r>
           </a:p>
         </p:txBody>
@@ -12752,7 +12752,7 @@
                 </a:solidFill>
                 <a:latin typeface="Arial"/>
               </a:rPr>
-              <a:t>MTD-1: 3.831   Δ -3.661</a:t>
+              <a:t>MTD-1: 0   Δ 264</a:t>
             </a:r>
           </a:p>
         </p:txBody>
@@ -13888,7 +13888,7 @@
                           </a:solidFill>
                           <a:latin typeface="Arial"/>
                         </a:rPr>
-                        <a:t>73</a:t>
+                        <a:t>0</a:t>
                       </a:r>
                     </a:p>
                   </a:txBody>
@@ -13935,7 +13935,7 @@
                           </a:solidFill>
                           <a:latin typeface="Arial"/>
                         </a:rPr>
-                        <a:t>17</a:t>
+                        <a:t>22</a:t>
                       </a:r>
                     </a:p>
                   </a:txBody>
@@ -13978,17 +13978,17 @@
                       <a:r>
                         <a:rPr sz="1050" b="0">
                           <a:solidFill>
-                            <a:srgbClr val="D73527"/>
-                          </a:solidFill>
-                          <a:latin typeface="Arial"/>
-                        </a:rPr>
-                        <a:t>-76,7%</a:t>
-                      </a:r>
-                    </a:p>
-                  </a:txBody>
-                  <a:tcPr marL="27432" marR="27432" marT="0" marB="0">
-                    <a:solidFill>
-                      <a:srgbClr val="FBE9E7"/>
+                            <a:srgbClr val="687386"/>
+                          </a:solidFill>
+                          <a:latin typeface="Arial"/>
+                        </a:rPr>
+                        <a:t>N/A</a:t>
+                      </a:r>
+                    </a:p>
+                  </a:txBody>
+                  <a:tcPr marL="27432" marR="27432" marT="0" marB="0">
+                    <a:solidFill>
+                      <a:srgbClr val="E9EDF2"/>
                     </a:solidFill>
                     <a:lnL w="9000" cap="flat" cmpd="sng" algn="ctr">
                       <a:solidFill>
@@ -14029,7 +14029,7 @@
                           </a:solidFill>
                           <a:latin typeface="Arial"/>
                         </a:rPr>
-                        <a:t>3.223</a:t>
+                        <a:t>0</a:t>
                       </a:r>
                     </a:p>
                   </a:txBody>
@@ -14076,7 +14076,7 @@
                           </a:solidFill>
                           <a:latin typeface="Arial"/>
                         </a:rPr>
-                        <a:t>170</a:t>
+                        <a:t>257</a:t>
                       </a:r>
                     </a:p>
                   </a:txBody>
@@ -14119,17 +14119,17 @@
                       <a:r>
                         <a:rPr sz="1050" b="0">
                           <a:solidFill>
-                            <a:srgbClr val="D73527"/>
-                          </a:solidFill>
-                          <a:latin typeface="Arial"/>
-                        </a:rPr>
-                        <a:t>-94,7%</a:t>
-                      </a:r>
-                    </a:p>
-                  </a:txBody>
-                  <a:tcPr marL="27432" marR="27432" marT="0" marB="0">
-                    <a:solidFill>
-                      <a:srgbClr val="FBE9E7"/>
+                            <a:srgbClr val="687386"/>
+                          </a:solidFill>
+                          <a:latin typeface="Arial"/>
+                        </a:rPr>
+                        <a:t>N/A</a:t>
+                      </a:r>
+                    </a:p>
+                  </a:txBody>
+                  <a:tcPr marL="27432" marR="27432" marT="0" marB="0">
+                    <a:solidFill>
+                      <a:srgbClr val="E9EDF2"/>
                     </a:solidFill>
                     <a:lnL w="9000" cap="flat" cmpd="sng" algn="ctr">
                       <a:solidFill>
@@ -14548,7 +14548,7 @@
                           </a:solidFill>
                           <a:latin typeface="Arial"/>
                         </a:rPr>
-                        <a:t>16</a:t>
+                        <a:t>0</a:t>
                       </a:r>
                     </a:p>
                   </a:txBody>
@@ -14595,6 +14595,100 @@
                           </a:solidFill>
                           <a:latin typeface="Arial"/>
                         </a:rPr>
+                        <a:t>1</a:t>
+                      </a:r>
+                    </a:p>
+                  </a:txBody>
+                  <a:tcPr marL="27432" marR="27432" marT="0" marB="0">
+                    <a:solidFill>
+                      <a:srgbClr val="FFFFFF"/>
+                    </a:solidFill>
+                    <a:lnL w="9000" cap="flat" cmpd="sng" algn="ctr">
+                      <a:solidFill>
+                        <a:srgbClr val="D8DEE7"/>
+                      </a:solidFill>
+                      <a:prstDash val="solid"/>
+                    </a:lnL>
+                    <a:lnR w="9000" cap="flat" cmpd="sng" algn="ctr">
+                      <a:solidFill>
+                        <a:srgbClr val="D8DEE7"/>
+                      </a:solidFill>
+                      <a:prstDash val="solid"/>
+                    </a:lnR>
+                    <a:lnT w="9000" cap="flat" cmpd="sng" algn="ctr">
+                      <a:solidFill>
+                        <a:srgbClr val="D8DEE7"/>
+                      </a:solidFill>
+                      <a:prstDash val="solid"/>
+                    </a:lnT>
+                    <a:lnB w="9000" cap="flat" cmpd="sng" algn="ctr">
+                      <a:solidFill>
+                        <a:srgbClr val="D8DEE7"/>
+                      </a:solidFill>
+                      <a:prstDash val="solid"/>
+                    </a:lnB>
+                  </a:tcPr>
+                </a:tc>
+                <a:tc>
+                  <a:txBody>
+                    <a:bodyPr lIns="27432" rIns="27432" tIns="0" bIns="0" anchor="ctr"/>
+                    <a:lstStyle/>
+                    <a:p>
+                      <a:pPr algn="ctr"/>
+                      <a:r>
+                        <a:rPr sz="1050" b="0">
+                          <a:solidFill>
+                            <a:srgbClr val="687386"/>
+                          </a:solidFill>
+                          <a:latin typeface="Arial"/>
+                        </a:rPr>
+                        <a:t>N/A</a:t>
+                      </a:r>
+                    </a:p>
+                  </a:txBody>
+                  <a:tcPr marL="27432" marR="27432" marT="0" marB="0">
+                    <a:solidFill>
+                      <a:srgbClr val="E9EDF2"/>
+                    </a:solidFill>
+                    <a:lnL w="9000" cap="flat" cmpd="sng" algn="ctr">
+                      <a:solidFill>
+                        <a:srgbClr val="D8DEE7"/>
+                      </a:solidFill>
+                      <a:prstDash val="solid"/>
+                    </a:lnL>
+                    <a:lnR w="9000" cap="flat" cmpd="sng" algn="ctr">
+                      <a:solidFill>
+                        <a:srgbClr val="D8DEE7"/>
+                      </a:solidFill>
+                      <a:prstDash val="solid"/>
+                    </a:lnR>
+                    <a:lnT w="9000" cap="flat" cmpd="sng" algn="ctr">
+                      <a:solidFill>
+                        <a:srgbClr val="D8DEE7"/>
+                      </a:solidFill>
+                      <a:prstDash val="solid"/>
+                    </a:lnT>
+                    <a:lnB w="9000" cap="flat" cmpd="sng" algn="ctr">
+                      <a:solidFill>
+                        <a:srgbClr val="D8DEE7"/>
+                      </a:solidFill>
+                      <a:prstDash val="solid"/>
+                    </a:lnB>
+                  </a:tcPr>
+                </a:tc>
+                <a:tc>
+                  <a:txBody>
+                    <a:bodyPr lIns="27432" rIns="27432" tIns="0" bIns="0" anchor="ctr"/>
+                    <a:lstStyle/>
+                    <a:p>
+                      <a:pPr algn="ctr"/>
+                      <a:r>
+                        <a:rPr sz="1050" b="0">
+                          <a:solidFill>
+                            <a:srgbClr val="20252B"/>
+                          </a:solidFill>
+                          <a:latin typeface="Arial"/>
+                        </a:rPr>
                         <a:t>0</a:t>
                       </a:r>
                     </a:p>
@@ -14636,160 +14730,66 @@
                     <a:p>
                       <a:pPr algn="ctr"/>
                       <a:r>
+                        <a:rPr sz="1050" b="1">
+                          <a:solidFill>
+                            <a:srgbClr val="20252B"/>
+                          </a:solidFill>
+                          <a:latin typeface="Arial"/>
+                        </a:rPr>
+                        <a:t>7</a:t>
+                      </a:r>
+                    </a:p>
+                  </a:txBody>
+                  <a:tcPr marL="27432" marR="27432" marT="0" marB="0">
+                    <a:solidFill>
+                      <a:srgbClr val="FFFFFF"/>
+                    </a:solidFill>
+                    <a:lnL w="9000" cap="flat" cmpd="sng" algn="ctr">
+                      <a:solidFill>
+                        <a:srgbClr val="D8DEE7"/>
+                      </a:solidFill>
+                      <a:prstDash val="solid"/>
+                    </a:lnL>
+                    <a:lnR w="9000" cap="flat" cmpd="sng" algn="ctr">
+                      <a:solidFill>
+                        <a:srgbClr val="D8DEE7"/>
+                      </a:solidFill>
+                      <a:prstDash val="solid"/>
+                    </a:lnR>
+                    <a:lnT w="9000" cap="flat" cmpd="sng" algn="ctr">
+                      <a:solidFill>
+                        <a:srgbClr val="D8DEE7"/>
+                      </a:solidFill>
+                      <a:prstDash val="solid"/>
+                    </a:lnT>
+                    <a:lnB w="9000" cap="flat" cmpd="sng" algn="ctr">
+                      <a:solidFill>
+                        <a:srgbClr val="D8DEE7"/>
+                      </a:solidFill>
+                      <a:prstDash val="solid"/>
+                    </a:lnB>
+                  </a:tcPr>
+                </a:tc>
+                <a:tc>
+                  <a:txBody>
+                    <a:bodyPr lIns="27432" rIns="27432" tIns="0" bIns="0" anchor="ctr"/>
+                    <a:lstStyle/>
+                    <a:p>
+                      <a:pPr algn="ctr"/>
+                      <a:r>
                         <a:rPr sz="1050" b="0">
                           <a:solidFill>
-                            <a:srgbClr val="D73527"/>
-                          </a:solidFill>
-                          <a:latin typeface="Arial"/>
-                        </a:rPr>
-                        <a:t>-100,0%</a:t>
-                      </a:r>
-                    </a:p>
-                  </a:txBody>
-                  <a:tcPr marL="27432" marR="27432" marT="0" marB="0">
-                    <a:solidFill>
-                      <a:srgbClr val="FBE9E7"/>
-                    </a:solidFill>
-                    <a:lnL w="9000" cap="flat" cmpd="sng" algn="ctr">
-                      <a:solidFill>
-                        <a:srgbClr val="D8DEE7"/>
-                      </a:solidFill>
-                      <a:prstDash val="solid"/>
-                    </a:lnL>
-                    <a:lnR w="9000" cap="flat" cmpd="sng" algn="ctr">
-                      <a:solidFill>
-                        <a:srgbClr val="D8DEE7"/>
-                      </a:solidFill>
-                      <a:prstDash val="solid"/>
-                    </a:lnR>
-                    <a:lnT w="9000" cap="flat" cmpd="sng" algn="ctr">
-                      <a:solidFill>
-                        <a:srgbClr val="D8DEE7"/>
-                      </a:solidFill>
-                      <a:prstDash val="solid"/>
-                    </a:lnT>
-                    <a:lnB w="9000" cap="flat" cmpd="sng" algn="ctr">
-                      <a:solidFill>
-                        <a:srgbClr val="D8DEE7"/>
-                      </a:solidFill>
-                      <a:prstDash val="solid"/>
-                    </a:lnB>
-                  </a:tcPr>
-                </a:tc>
-                <a:tc>
-                  <a:txBody>
-                    <a:bodyPr lIns="27432" rIns="27432" tIns="0" bIns="0" anchor="ctr"/>
-                    <a:lstStyle/>
-                    <a:p>
-                      <a:pPr algn="ctr"/>
-                      <a:r>
-                        <a:rPr sz="1050" b="0">
-                          <a:solidFill>
-                            <a:srgbClr val="20252B"/>
-                          </a:solidFill>
-                          <a:latin typeface="Arial"/>
-                        </a:rPr>
-                        <a:t>608</a:t>
-                      </a:r>
-                    </a:p>
-                  </a:txBody>
-                  <a:tcPr marL="27432" marR="27432" marT="0" marB="0">
-                    <a:solidFill>
-                      <a:srgbClr val="FFFFFF"/>
-                    </a:solidFill>
-                    <a:lnL w="9000" cap="flat" cmpd="sng" algn="ctr">
-                      <a:solidFill>
-                        <a:srgbClr val="D8DEE7"/>
-                      </a:solidFill>
-                      <a:prstDash val="solid"/>
-                    </a:lnL>
-                    <a:lnR w="9000" cap="flat" cmpd="sng" algn="ctr">
-                      <a:solidFill>
-                        <a:srgbClr val="D8DEE7"/>
-                      </a:solidFill>
-                      <a:prstDash val="solid"/>
-                    </a:lnR>
-                    <a:lnT w="9000" cap="flat" cmpd="sng" algn="ctr">
-                      <a:solidFill>
-                        <a:srgbClr val="D8DEE7"/>
-                      </a:solidFill>
-                      <a:prstDash val="solid"/>
-                    </a:lnT>
-                    <a:lnB w="9000" cap="flat" cmpd="sng" algn="ctr">
-                      <a:solidFill>
-                        <a:srgbClr val="D8DEE7"/>
-                      </a:solidFill>
-                      <a:prstDash val="solid"/>
-                    </a:lnB>
-                  </a:tcPr>
-                </a:tc>
-                <a:tc>
-                  <a:txBody>
-                    <a:bodyPr lIns="27432" rIns="27432" tIns="0" bIns="0" anchor="ctr"/>
-                    <a:lstStyle/>
-                    <a:p>
-                      <a:pPr algn="ctr"/>
-                      <a:r>
-                        <a:rPr sz="1050" b="1">
-                          <a:solidFill>
-                            <a:srgbClr val="20252B"/>
-                          </a:solidFill>
-                          <a:latin typeface="Arial"/>
-                        </a:rPr>
-                        <a:t>0</a:t>
-                      </a:r>
-                    </a:p>
-                  </a:txBody>
-                  <a:tcPr marL="27432" marR="27432" marT="0" marB="0">
-                    <a:solidFill>
-                      <a:srgbClr val="FFFFFF"/>
-                    </a:solidFill>
-                    <a:lnL w="9000" cap="flat" cmpd="sng" algn="ctr">
-                      <a:solidFill>
-                        <a:srgbClr val="D8DEE7"/>
-                      </a:solidFill>
-                      <a:prstDash val="solid"/>
-                    </a:lnL>
-                    <a:lnR w="9000" cap="flat" cmpd="sng" algn="ctr">
-                      <a:solidFill>
-                        <a:srgbClr val="D8DEE7"/>
-                      </a:solidFill>
-                      <a:prstDash val="solid"/>
-                    </a:lnR>
-                    <a:lnT w="9000" cap="flat" cmpd="sng" algn="ctr">
-                      <a:solidFill>
-                        <a:srgbClr val="D8DEE7"/>
-                      </a:solidFill>
-                      <a:prstDash val="solid"/>
-                    </a:lnT>
-                    <a:lnB w="9000" cap="flat" cmpd="sng" algn="ctr">
-                      <a:solidFill>
-                        <a:srgbClr val="D8DEE7"/>
-                      </a:solidFill>
-                      <a:prstDash val="solid"/>
-                    </a:lnB>
-                  </a:tcPr>
-                </a:tc>
-                <a:tc>
-                  <a:txBody>
-                    <a:bodyPr lIns="27432" rIns="27432" tIns="0" bIns="0" anchor="ctr"/>
-                    <a:lstStyle/>
-                    <a:p>
-                      <a:pPr algn="ctr"/>
-                      <a:r>
-                        <a:rPr sz="1050" b="0">
-                          <a:solidFill>
-                            <a:srgbClr val="D73527"/>
-                          </a:solidFill>
-                          <a:latin typeface="Arial"/>
-                        </a:rPr>
-                        <a:t>-100,0%</a:t>
-                      </a:r>
-                    </a:p>
-                  </a:txBody>
-                  <a:tcPr marL="27432" marR="27432" marT="0" marB="0">
-                    <a:solidFill>
-                      <a:srgbClr val="FBE9E7"/>
+                            <a:srgbClr val="687386"/>
+                          </a:solidFill>
+                          <a:latin typeface="Arial"/>
+                        </a:rPr>
+                        <a:t>N/A</a:t>
+                      </a:r>
+                    </a:p>
+                  </a:txBody>
+                  <a:tcPr marL="27432" marR="27432" marT="0" marB="0">
+                    <a:solidFill>
+                      <a:srgbClr val="E9EDF2"/>
                     </a:solidFill>
                     <a:lnL w="9000" cap="flat" cmpd="sng" algn="ctr">
                       <a:solidFill>
@@ -22873,7 +22873,7 @@
                 </a:solidFill>
                 <a:latin typeface="Arial"/>
               </a:rPr>
-              <a:t>ODP dikunjungi  99 (23,2%)</a:t>
+              <a:t>ODP dikunjungi  100 (23,4%)</a:t>
             </a:r>
           </a:p>
         </p:txBody>
@@ -22943,7 +22943,7 @@
                 </a:solidFill>
                 <a:latin typeface="Arial"/>
               </a:rPr>
-              <a:t>416</a:t>
+              <a:t>429</a:t>
             </a:r>
           </a:p>
         </p:txBody>
@@ -23095,7 +23095,7 @@
                 </a:solidFill>
                 <a:latin typeface="Arial"/>
               </a:rPr>
-              <a:t>ODP dikunjungi  120 (83,9%)</a:t>
+              <a:t>ODP dikunjungi  121 (84,6%)</a:t>
             </a:r>
           </a:p>
         </p:txBody>
@@ -23165,7 +23165,7 @@
                 </a:solidFill>
                 <a:latin typeface="Arial"/>
               </a:rPr>
-              <a:t>364</a:t>
+              <a:t>369</a:t>
             </a:r>
           </a:p>
         </p:txBody>
@@ -35276,7 +35276,7 @@
                           </a:solidFill>
                           <a:latin typeface="Arial"/>
                         </a:rPr>
-                        <a:t>Mulyandry malaikosa</a:t>
+                        <a:t>JEPRIANUS MUJI</a:t>
                       </a:r>
                     </a:p>
                   </a:txBody>
@@ -35323,7 +35323,7 @@
                           </a:solidFill>
                           <a:latin typeface="Arial"/>
                         </a:rPr>
-                        <a:t>Kupang Rote - Malaka Timtim Belu</a:t>
+                        <a:t>Sumba</a:t>
                       </a:r>
                     </a:p>
                   </a:txBody>
@@ -35560,7 +35560,7 @@
                           </a:solidFill>
                           <a:latin typeface="Arial"/>
                         </a:rPr>
-                        <a:t>ALFANDI KAREL</a:t>
+                        <a:t>Mulyandry malaikosa</a:t>
                       </a:r>
                     </a:p>
                   </a:txBody>
@@ -35844,7 +35844,7 @@
                           </a:solidFill>
                           <a:latin typeface="Arial"/>
                         </a:rPr>
-                        <a:t>FERI ANDI SEMBIRING</a:t>
+                        <a:t>ALFANDI KAREL</a:t>
                       </a:r>
                     </a:p>
                   </a:txBody>
@@ -35891,7 +35891,7 @@
                           </a:solidFill>
                           <a:latin typeface="Arial"/>
                         </a:rPr>
-                        <a:t>Sumba</a:t>
+                        <a:t>Kupang Rote - Malaka Timtim Belu</a:t>
                       </a:r>
                     </a:p>
                   </a:txBody>
@@ -36128,7 +36128,7 @@
                           </a:solidFill>
                           <a:latin typeface="Arial"/>
                         </a:rPr>
-                        <a:t>JEPRIANUS MUJI</a:t>
+                        <a:t>FERI ANDI SEMBIRING</a:t>
                       </a:r>
                     </a:p>
                   </a:txBody>
